--- a/examples/ppt/tables/tables-merged.pptx
+++ b/examples/ppt/tables/tables-merged.pptx
@@ -5,8 +5,8 @@
     <p:sldMasterId xmlns:r="http://schemas.openxmlformats.org/officeDocument/2006/relationships" id="2147483648" r:id="rId1"/>
   </p:sldMasterIdLst>
   <p:sldIdLst>
-    <p:sldId id="256" r:id="R8e06ff0e53864710"/>
-    <p:sldId id="257" r:id="Rb59c5cd997fe4c00"/>
+    <p:sldId id="256" r:id="R121e29ff2304436f"/>
+    <p:sldId id="257" r:id="Rca158435d0534d70"/>
   </p:sldIdLst>
   <p:sldSz cx="12192000" cy="6858000"/>
   <p:notesSz cx="6858000" cy="9144000"/>
@@ -281,7 +281,7 @@
 </file>
 
 <file path=ppt/slideMasters/slideMaster1.xml><?xml version="1.0" encoding="utf-8"?>
-<p:sldMaster xmlns:p="http://schemas.openxmlformats.org/presentationml/2006/main">
+<p:sldMaster xmlns:r="http://schemas.openxmlformats.org/officeDocument/2006/relationships" xmlns:p="http://schemas.openxmlformats.org/presentationml/2006/main">
   <p:cSld>
     <p:spTree>
       <p:nvGrpSpPr>
@@ -304,7 +304,7 @@
 </file>
 
 <file path=ppt/slides/slide1.xml><?xml version="1.0" encoding="utf-8"?>
-<p:sld xmlns:a="http://schemas.openxmlformats.org/drawingml/2006/main" xmlns:p="http://schemas.openxmlformats.org/presentationml/2006/main">
+<p:sld xmlns:p="http://schemas.openxmlformats.org/presentationml/2006/main">
   <p:cSld>
     <p:spTree>
       <p:nvGrpSpPr>
@@ -315,8 +315,8 @@
       <p:grpSpPr/>
       <p:sp>
         <p:nvSpPr>
-          <p:cNvPr id="10000" name="TextBox 1"/>
-          <p:cNvSpPr/>
+          <p:cNvPr id="100000" name="TextBox 1"/>
+          <p:cNvSpPr txBox="1"/>
           <p:nvPr/>
         </p:nvSpPr>
         <p:spPr>
@@ -327,11 +327,6 @@
           <a:prstGeom xmlns:a="http://schemas.openxmlformats.org/drawingml/2006/main" prst="rect">
             <a:avLst/>
           </a:prstGeom>
-          <a:ln xmlns:a="http://schemas.openxmlformats.org/drawingml/2006/main" w="9525">
-            <a:solidFill>
-              <a:srgbClr val="595959"/>
-            </a:solidFill>
-          </a:ln>
         </p:spPr>
         <p:txBody>
           <a:bodyPr xmlns:a="http://schemas.openxmlformats.org/drawingml/2006/main"/>
@@ -346,7 +341,7 @@
       </p:sp>
       <p:graphicFrame>
         <p:nvGraphicFramePr>
-          <p:cNvPr id="10001" name="Table 1"/>
+          <p:cNvPr id="100001" name="Table 1"/>
           <p:cNvGraphicFramePr/>
           <p:nvPr/>
         </p:nvGraphicFramePr>
@@ -942,7 +937,7 @@
 </file>
 
 <file path=ppt/slides/slide2.xml><?xml version="1.0" encoding="utf-8"?>
-<p:sld xmlns:a="http://schemas.openxmlformats.org/drawingml/2006/main" xmlns:p="http://schemas.openxmlformats.org/presentationml/2006/main">
+<p:sld xmlns:p="http://schemas.openxmlformats.org/presentationml/2006/main">
   <p:cSld>
     <p:spTree>
       <p:nvGrpSpPr>
@@ -953,8 +948,8 @@
       <p:grpSpPr/>
       <p:sp>
         <p:nvSpPr>
-          <p:cNvPr id="10002" name="TextBox 1"/>
-          <p:cNvSpPr/>
+          <p:cNvPr id="100002" name="TextBox 1"/>
+          <p:cNvSpPr txBox="1"/>
           <p:nvPr/>
         </p:nvSpPr>
         <p:spPr>
@@ -965,11 +960,6 @@
           <a:prstGeom xmlns:a="http://schemas.openxmlformats.org/drawingml/2006/main" prst="rect">
             <a:avLst/>
           </a:prstGeom>
-          <a:ln xmlns:a="http://schemas.openxmlformats.org/drawingml/2006/main" w="9525">
-            <a:solidFill>
-              <a:srgbClr val="595959"/>
-            </a:solidFill>
-          </a:ln>
         </p:spPr>
         <p:txBody>
           <a:bodyPr xmlns:a="http://schemas.openxmlformats.org/drawingml/2006/main"/>
@@ -984,7 +974,7 @@
       </p:sp>
       <p:graphicFrame>
         <p:nvGraphicFramePr>
-          <p:cNvPr id="10003" name="Table 1"/>
+          <p:cNvPr id="100003" name="Table 1"/>
           <p:cNvGraphicFramePr/>
           <p:nvPr/>
         </p:nvGraphicFramePr>
